--- a/docs/ARM-112_Presentation.pptx
+++ b/docs/ARM-112_Presentation.pptx
@@ -7108,68 +7108,33 @@
           <a:ln/>
         </p:spPr>
       </p:sp>
-      <p:sp>
-        <p:nvSpPr>
-          <p:cNvPr id="5" name="Shape 3"/>
-          <p:cNvSpPr/>
-          <p:nvPr/>
-        </p:nvSpPr>
-        <p:spPr>
-          <a:xfrm>
-            <a:off x="1088136" y="1828800"/>
+      <p:pic>
+        <p:nvPicPr>
+          <p:cNvPr id="5" name="Image 0" descr="/Users/ruslanakimov/Desktop/LCT/photos/crops/akimov.jpg">    </p:cNvPr>
+          <p:cNvPicPr>
+            <a:picLocks noChangeAspect="1"/>
+          </p:cNvPicPr>
+          <p:nvPr/>
+        </p:nvPicPr>
+        <p:blipFill>
+          <a:blip r:embed="rId2"/>
+          <a:stretch>
+            <a:fillRect/>
+          </a:stretch>
+        </p:blipFill>
+        <p:spPr>
+          <a:xfrm>
+            <a:off x="1088136" y="1737360"/>
             <a:ext cx="822960" cy="822960"/>
           </a:xfrm>
           <a:prstGeom prst="ellipse">
             <a:avLst/>
           </a:prstGeom>
-          <a:solidFill>
-            <a:srgbClr val="FFD6E4"/>
-          </a:solidFill>
-          <a:ln/>
-        </p:spPr>
-      </p:sp>
-      <p:sp>
-        <p:nvSpPr>
-          <p:cNvPr id="6" name="Text 4"/>
-          <p:cNvSpPr txBox="1"/>
-          <p:nvPr/>
-        </p:nvSpPr>
-        <p:spPr>
-          <a:xfrm>
-            <a:off x="1088136" y="1828800"/>
-            <a:ext cx="822960" cy="822960"/>
-          </a:xfrm>
-          <a:prstGeom prst="rect">
-            <a:avLst/>
-          </a:prstGeom>
-          <a:noFill/>
-          <a:ln/>
-        </p:spPr>
-        <p:txBody>
-          <a:bodyPr wrap="square" lIns="0" tIns="0" rIns="0" bIns="0" rtlCol="0" anchor="ctr"/>
-          <a:lstStyle/>
-          <a:p>
-            <a:pPr algn="ctr" indent="0" marL="0">
-              <a:buNone/>
-            </a:pPr>
-            <a:r>
-              <a:rPr lang="en-US" sz="2000" b="1" dirty="0">
-                <a:solidFill>
-                  <a:srgbClr val="520978"/>
-                </a:solidFill>
-                <a:latin typeface="Montserrat" pitchFamily="34" charset="0"/>
-                <a:ea typeface="Montserrat" pitchFamily="34" charset="-122"/>
-                <a:cs typeface="Montserrat" pitchFamily="34" charset="-120"/>
-              </a:rPr>
-              <a:t>РА</a:t>
-            </a:r>
-            <a:endParaRPr lang="en-US" sz="2000" dirty="0"/>
-          </a:p>
-        </p:txBody>
-      </p:sp>
-      <p:sp>
-        <p:nvSpPr>
-          <p:cNvPr id="7" name="Text 5"/>
+        </p:spPr>
+      </p:pic>
+      <p:sp>
+        <p:nvSpPr>
+          <p:cNvPr id="6" name="Text 3"/>
           <p:cNvSpPr txBox="1"/>
           <p:nvPr/>
         </p:nvSpPr>
@@ -7208,7 +7173,7 @@
       </p:sp>
       <p:sp>
         <p:nvSpPr>
-          <p:cNvPr id="8" name="Text 6"/>
+          <p:cNvPr id="7" name="Text 4"/>
           <p:cNvSpPr txBox="1"/>
           <p:nvPr/>
         </p:nvSpPr>
@@ -7247,7 +7212,7 @@
       </p:sp>
       <p:sp>
         <p:nvSpPr>
-          <p:cNvPr id="9" name="Text 7"/>
+          <p:cNvPr id="8" name="Text 5"/>
           <p:cNvSpPr txBox="1"/>
           <p:nvPr/>
         </p:nvSpPr>
@@ -7286,7 +7251,7 @@
       </p:sp>
       <p:sp>
         <p:nvSpPr>
-          <p:cNvPr id="10" name="Text 8"/>
+          <p:cNvPr id="9" name="Text 6"/>
           <p:cNvSpPr txBox="1"/>
           <p:nvPr/>
         </p:nvSpPr>
@@ -7325,7 +7290,7 @@
       </p:sp>
       <p:sp>
         <p:nvSpPr>
-          <p:cNvPr id="11" name="Shape 9"/>
+          <p:cNvPr id="10" name="Shape 7"/>
           <p:cNvSpPr/>
           <p:nvPr/>
         </p:nvSpPr>
@@ -7345,68 +7310,33 @@
           <a:ln/>
         </p:spPr>
       </p:sp>
-      <p:sp>
-        <p:nvSpPr>
-          <p:cNvPr id="12" name="Shape 10"/>
-          <p:cNvSpPr/>
-          <p:nvPr/>
-        </p:nvSpPr>
-        <p:spPr>
-          <a:xfrm>
-            <a:off x="3337560" y="1828800"/>
+      <p:pic>
+        <p:nvPicPr>
+          <p:cNvPr id="11" name="Image 1" descr="/Users/ruslanakimov/Desktop/LCT/photos/crops/demyanenko.jpg">    </p:cNvPr>
+          <p:cNvPicPr>
+            <a:picLocks noChangeAspect="1"/>
+          </p:cNvPicPr>
+          <p:nvPr/>
+        </p:nvPicPr>
+        <p:blipFill>
+          <a:blip r:embed="rId3"/>
+          <a:stretch>
+            <a:fillRect/>
+          </a:stretch>
+        </p:blipFill>
+        <p:spPr>
+          <a:xfrm>
+            <a:off x="3337560" y="1737360"/>
             <a:ext cx="822960" cy="822960"/>
           </a:xfrm>
           <a:prstGeom prst="ellipse">
             <a:avLst/>
           </a:prstGeom>
-          <a:solidFill>
-            <a:srgbClr val="FFD6E4"/>
-          </a:solidFill>
-          <a:ln/>
-        </p:spPr>
-      </p:sp>
-      <p:sp>
-        <p:nvSpPr>
-          <p:cNvPr id="13" name="Text 11"/>
-          <p:cNvSpPr txBox="1"/>
-          <p:nvPr/>
-        </p:nvSpPr>
-        <p:spPr>
-          <a:xfrm>
-            <a:off x="3337560" y="1828800"/>
-            <a:ext cx="822960" cy="822960"/>
-          </a:xfrm>
-          <a:prstGeom prst="rect">
-            <a:avLst/>
-          </a:prstGeom>
-          <a:noFill/>
-          <a:ln/>
-        </p:spPr>
-        <p:txBody>
-          <a:bodyPr wrap="square" lIns="0" tIns="0" rIns="0" bIns="0" rtlCol="0" anchor="ctr"/>
-          <a:lstStyle/>
-          <a:p>
-            <a:pPr algn="ctr" indent="0" marL="0">
-              <a:buNone/>
-            </a:pPr>
-            <a:r>
-              <a:rPr lang="en-US" sz="2000" b="1" dirty="0">
-                <a:solidFill>
-                  <a:srgbClr val="520978"/>
-                </a:solidFill>
-                <a:latin typeface="Montserrat" pitchFamily="34" charset="0"/>
-                <a:ea typeface="Montserrat" pitchFamily="34" charset="-122"/>
-                <a:cs typeface="Montserrat" pitchFamily="34" charset="-120"/>
-              </a:rPr>
-              <a:t>АД</a:t>
-            </a:r>
-            <a:endParaRPr lang="en-US" sz="2000" dirty="0"/>
-          </a:p>
-        </p:txBody>
-      </p:sp>
-      <p:sp>
-        <p:nvSpPr>
-          <p:cNvPr id="14" name="Text 12"/>
+        </p:spPr>
+      </p:pic>
+      <p:sp>
+        <p:nvSpPr>
+          <p:cNvPr id="12" name="Text 8"/>
           <p:cNvSpPr txBox="1"/>
           <p:nvPr/>
         </p:nvSpPr>
@@ -7445,7 +7375,7 @@
       </p:sp>
       <p:sp>
         <p:nvSpPr>
-          <p:cNvPr id="15" name="Text 13"/>
+          <p:cNvPr id="13" name="Text 9"/>
           <p:cNvSpPr txBox="1"/>
           <p:nvPr/>
         </p:nvSpPr>
@@ -7484,7 +7414,7 @@
       </p:sp>
       <p:sp>
         <p:nvSpPr>
-          <p:cNvPr id="16" name="Text 14"/>
+          <p:cNvPr id="14" name="Text 10"/>
           <p:cNvSpPr txBox="1"/>
           <p:nvPr/>
         </p:nvSpPr>
@@ -7523,7 +7453,7 @@
       </p:sp>
       <p:sp>
         <p:nvSpPr>
-          <p:cNvPr id="17" name="Text 15"/>
+          <p:cNvPr id="15" name="Text 11"/>
           <p:cNvSpPr txBox="1"/>
           <p:nvPr/>
         </p:nvSpPr>
@@ -7562,7 +7492,7 @@
       </p:sp>
       <p:sp>
         <p:nvSpPr>
-          <p:cNvPr id="18" name="Shape 16"/>
+          <p:cNvPr id="16" name="Shape 12"/>
           <p:cNvSpPr/>
           <p:nvPr/>
         </p:nvSpPr>
@@ -7582,68 +7512,33 @@
           <a:ln/>
         </p:spPr>
       </p:sp>
-      <p:sp>
-        <p:nvSpPr>
-          <p:cNvPr id="19" name="Shape 17"/>
-          <p:cNvSpPr/>
-          <p:nvPr/>
-        </p:nvSpPr>
-        <p:spPr>
-          <a:xfrm>
-            <a:off x="5586984" y="1828800"/>
+      <p:pic>
+        <p:nvPicPr>
+          <p:cNvPr id="17" name="Image 2" descr="/Users/ruslanakimov/Desktop/LCT/photos/crops/krivulina.jpg">    </p:cNvPr>
+          <p:cNvPicPr>
+            <a:picLocks noChangeAspect="1"/>
+          </p:cNvPicPr>
+          <p:nvPr/>
+        </p:nvPicPr>
+        <p:blipFill>
+          <a:blip r:embed="rId4"/>
+          <a:stretch>
+            <a:fillRect/>
+          </a:stretch>
+        </p:blipFill>
+        <p:spPr>
+          <a:xfrm>
+            <a:off x="5586984" y="1737360"/>
             <a:ext cx="822960" cy="822960"/>
           </a:xfrm>
           <a:prstGeom prst="ellipse">
             <a:avLst/>
           </a:prstGeom>
-          <a:solidFill>
-            <a:srgbClr val="FFD6E4"/>
-          </a:solidFill>
-          <a:ln/>
-        </p:spPr>
-      </p:sp>
-      <p:sp>
-        <p:nvSpPr>
-          <p:cNvPr id="20" name="Text 18"/>
-          <p:cNvSpPr txBox="1"/>
-          <p:nvPr/>
-        </p:nvSpPr>
-        <p:spPr>
-          <a:xfrm>
-            <a:off x="5586984" y="1828800"/>
-            <a:ext cx="822960" cy="822960"/>
-          </a:xfrm>
-          <a:prstGeom prst="rect">
-            <a:avLst/>
-          </a:prstGeom>
-          <a:noFill/>
-          <a:ln/>
-        </p:spPr>
-        <p:txBody>
-          <a:bodyPr wrap="square" lIns="0" tIns="0" rIns="0" bIns="0" rtlCol="0" anchor="ctr"/>
-          <a:lstStyle/>
-          <a:p>
-            <a:pPr algn="ctr" indent="0" marL="0">
-              <a:buNone/>
-            </a:pPr>
-            <a:r>
-              <a:rPr lang="en-US" sz="2000" b="1" dirty="0">
-                <a:solidFill>
-                  <a:srgbClr val="520978"/>
-                </a:solidFill>
-                <a:latin typeface="Montserrat" pitchFamily="34" charset="0"/>
-                <a:ea typeface="Montserrat" pitchFamily="34" charset="-122"/>
-                <a:cs typeface="Montserrat" pitchFamily="34" charset="-120"/>
-              </a:rPr>
-              <a:t>АК</a:t>
-            </a:r>
-            <a:endParaRPr lang="en-US" sz="2000" dirty="0"/>
-          </a:p>
-        </p:txBody>
-      </p:sp>
-      <p:sp>
-        <p:nvSpPr>
-          <p:cNvPr id="21" name="Text 19"/>
+        </p:spPr>
+      </p:pic>
+      <p:sp>
+        <p:nvSpPr>
+          <p:cNvPr id="18" name="Text 13"/>
           <p:cNvSpPr txBox="1"/>
           <p:nvPr/>
         </p:nvSpPr>
@@ -7682,7 +7577,7 @@
       </p:sp>
       <p:sp>
         <p:nvSpPr>
-          <p:cNvPr id="22" name="Text 20"/>
+          <p:cNvPr id="19" name="Text 14"/>
           <p:cNvSpPr txBox="1"/>
           <p:nvPr/>
         </p:nvSpPr>
@@ -7721,7 +7616,7 @@
       </p:sp>
       <p:sp>
         <p:nvSpPr>
-          <p:cNvPr id="23" name="Text 21"/>
+          <p:cNvPr id="20" name="Text 15"/>
           <p:cNvSpPr txBox="1"/>
           <p:nvPr/>
         </p:nvSpPr>
@@ -7760,7 +7655,7 @@
       </p:sp>
       <p:sp>
         <p:nvSpPr>
-          <p:cNvPr id="24" name="Text 22"/>
+          <p:cNvPr id="21" name="Text 16"/>
           <p:cNvSpPr txBox="1"/>
           <p:nvPr/>
         </p:nvSpPr>
@@ -7799,7 +7694,7 @@
       </p:sp>
       <p:sp>
         <p:nvSpPr>
-          <p:cNvPr id="25" name="Shape 23"/>
+          <p:cNvPr id="22" name="Shape 17"/>
           <p:cNvSpPr/>
           <p:nvPr/>
         </p:nvSpPr>
@@ -7819,68 +7714,33 @@
           <a:ln/>
         </p:spPr>
       </p:sp>
-      <p:sp>
-        <p:nvSpPr>
-          <p:cNvPr id="26" name="Shape 24"/>
-          <p:cNvSpPr/>
-          <p:nvPr/>
-        </p:nvSpPr>
-        <p:spPr>
-          <a:xfrm>
-            <a:off x="7836408" y="1828800"/>
+      <p:pic>
+        <p:nvPicPr>
+          <p:cNvPr id="23" name="Image 3" descr="/Users/ruslanakimov/Desktop/LCT/photos/crops/goncharuk.jpg">    </p:cNvPr>
+          <p:cNvPicPr>
+            <a:picLocks noChangeAspect="1"/>
+          </p:cNvPicPr>
+          <p:nvPr/>
+        </p:nvPicPr>
+        <p:blipFill>
+          <a:blip r:embed="rId5"/>
+          <a:stretch>
+            <a:fillRect/>
+          </a:stretch>
+        </p:blipFill>
+        <p:spPr>
+          <a:xfrm>
+            <a:off x="7836408" y="1737360"/>
             <a:ext cx="822960" cy="822960"/>
           </a:xfrm>
           <a:prstGeom prst="ellipse">
             <a:avLst/>
           </a:prstGeom>
-          <a:solidFill>
-            <a:srgbClr val="FFD6E4"/>
-          </a:solidFill>
-          <a:ln/>
-        </p:spPr>
-      </p:sp>
-      <p:sp>
-        <p:nvSpPr>
-          <p:cNvPr id="27" name="Text 25"/>
-          <p:cNvSpPr txBox="1"/>
-          <p:nvPr/>
-        </p:nvSpPr>
-        <p:spPr>
-          <a:xfrm>
-            <a:off x="7836408" y="1828800"/>
-            <a:ext cx="822960" cy="822960"/>
-          </a:xfrm>
-          <a:prstGeom prst="rect">
-            <a:avLst/>
-          </a:prstGeom>
-          <a:noFill/>
-          <a:ln/>
-        </p:spPr>
-        <p:txBody>
-          <a:bodyPr wrap="square" lIns="0" tIns="0" rIns="0" bIns="0" rtlCol="0" anchor="ctr"/>
-          <a:lstStyle/>
-          <a:p>
-            <a:pPr algn="ctr" indent="0" marL="0">
-              <a:buNone/>
-            </a:pPr>
-            <a:r>
-              <a:rPr lang="en-US" sz="2000" b="1" dirty="0">
-                <a:solidFill>
-                  <a:srgbClr val="520978"/>
-                </a:solidFill>
-                <a:latin typeface="Montserrat" pitchFamily="34" charset="0"/>
-                <a:ea typeface="Montserrat" pitchFamily="34" charset="-122"/>
-                <a:cs typeface="Montserrat" pitchFamily="34" charset="-120"/>
-              </a:rPr>
-              <a:t>ВГ</a:t>
-            </a:r>
-            <a:endParaRPr lang="en-US" sz="2000" dirty="0"/>
-          </a:p>
-        </p:txBody>
-      </p:sp>
-      <p:sp>
-        <p:nvSpPr>
-          <p:cNvPr id="28" name="Text 26"/>
+        </p:spPr>
+      </p:pic>
+      <p:sp>
+        <p:nvSpPr>
+          <p:cNvPr id="24" name="Text 18"/>
           <p:cNvSpPr txBox="1"/>
           <p:nvPr/>
         </p:nvSpPr>
@@ -7919,7 +7779,7 @@
       </p:sp>
       <p:sp>
         <p:nvSpPr>
-          <p:cNvPr id="29" name="Text 27"/>
+          <p:cNvPr id="25" name="Text 19"/>
           <p:cNvSpPr txBox="1"/>
           <p:nvPr/>
         </p:nvSpPr>
@@ -7958,7 +7818,7 @@
       </p:sp>
       <p:sp>
         <p:nvSpPr>
-          <p:cNvPr id="30" name="Text 28"/>
+          <p:cNvPr id="26" name="Text 20"/>
           <p:cNvSpPr txBox="1"/>
           <p:nvPr/>
         </p:nvSpPr>
@@ -7997,7 +7857,7 @@
       </p:sp>
       <p:sp>
         <p:nvSpPr>
-          <p:cNvPr id="31" name="Text 29"/>
+          <p:cNvPr id="27" name="Text 21"/>
           <p:cNvSpPr txBox="1"/>
           <p:nvPr/>
         </p:nvSpPr>
@@ -8036,7 +7896,7 @@
       </p:sp>
       <p:sp>
         <p:nvSpPr>
-          <p:cNvPr id="32" name="Shape 30"/>
+          <p:cNvPr id="28" name="Shape 22"/>
           <p:cNvSpPr/>
           <p:nvPr/>
         </p:nvSpPr>
@@ -8056,68 +7916,33 @@
           <a:ln/>
         </p:spPr>
       </p:sp>
-      <p:sp>
-        <p:nvSpPr>
-          <p:cNvPr id="33" name="Shape 31"/>
-          <p:cNvSpPr/>
-          <p:nvPr/>
-        </p:nvSpPr>
-        <p:spPr>
-          <a:xfrm>
-            <a:off x="10085832" y="1828800"/>
+      <p:pic>
+        <p:nvPicPr>
+          <p:cNvPr id="29" name="Image 4" descr="/Users/ruslanakimov/Desktop/LCT/photos/crops/stankevich.jpg">    </p:cNvPr>
+          <p:cNvPicPr>
+            <a:picLocks noChangeAspect="1"/>
+          </p:cNvPicPr>
+          <p:nvPr/>
+        </p:nvPicPr>
+        <p:blipFill>
+          <a:blip r:embed="rId6"/>
+          <a:stretch>
+            <a:fillRect/>
+          </a:stretch>
+        </p:blipFill>
+        <p:spPr>
+          <a:xfrm>
+            <a:off x="10085832" y="1737360"/>
             <a:ext cx="822960" cy="822960"/>
           </a:xfrm>
           <a:prstGeom prst="ellipse">
             <a:avLst/>
           </a:prstGeom>
-          <a:solidFill>
-            <a:srgbClr val="FFD6E4"/>
-          </a:solidFill>
-          <a:ln/>
-        </p:spPr>
-      </p:sp>
-      <p:sp>
-        <p:nvSpPr>
-          <p:cNvPr id="34" name="Text 32"/>
-          <p:cNvSpPr txBox="1"/>
-          <p:nvPr/>
-        </p:nvSpPr>
-        <p:spPr>
-          <a:xfrm>
-            <a:off x="10085832" y="1828800"/>
-            <a:ext cx="822960" cy="822960"/>
-          </a:xfrm>
-          <a:prstGeom prst="rect">
-            <a:avLst/>
-          </a:prstGeom>
-          <a:noFill/>
-          <a:ln/>
-        </p:spPr>
-        <p:txBody>
-          <a:bodyPr wrap="square" lIns="0" tIns="0" rIns="0" bIns="0" rtlCol="0" anchor="ctr"/>
-          <a:lstStyle/>
-          <a:p>
-            <a:pPr algn="ctr" indent="0" marL="0">
-              <a:buNone/>
-            </a:pPr>
-            <a:r>
-              <a:rPr lang="en-US" sz="2000" b="1" dirty="0">
-                <a:solidFill>
-                  <a:srgbClr val="520978"/>
-                </a:solidFill>
-                <a:latin typeface="Montserrat" pitchFamily="34" charset="0"/>
-                <a:ea typeface="Montserrat" pitchFamily="34" charset="-122"/>
-                <a:cs typeface="Montserrat" pitchFamily="34" charset="-120"/>
-              </a:rPr>
-              <a:t>ОС</a:t>
-            </a:r>
-            <a:endParaRPr lang="en-US" sz="2000" dirty="0"/>
-          </a:p>
-        </p:txBody>
-      </p:sp>
-      <p:sp>
-        <p:nvSpPr>
-          <p:cNvPr id="35" name="Text 33"/>
+        </p:spPr>
+      </p:pic>
+      <p:sp>
+        <p:nvSpPr>
+          <p:cNvPr id="30" name="Text 23"/>
           <p:cNvSpPr txBox="1"/>
           <p:nvPr/>
         </p:nvSpPr>
@@ -8156,7 +7981,7 @@
       </p:sp>
       <p:sp>
         <p:nvSpPr>
-          <p:cNvPr id="36" name="Text 34"/>
+          <p:cNvPr id="31" name="Text 24"/>
           <p:cNvSpPr txBox="1"/>
           <p:nvPr/>
         </p:nvSpPr>
@@ -8195,7 +8020,7 @@
       </p:sp>
       <p:sp>
         <p:nvSpPr>
-          <p:cNvPr id="37" name="Text 35"/>
+          <p:cNvPr id="32" name="Text 25"/>
           <p:cNvSpPr txBox="1"/>
           <p:nvPr/>
         </p:nvSpPr>
@@ -8234,7 +8059,7 @@
       </p:sp>
       <p:sp>
         <p:nvSpPr>
-          <p:cNvPr id="38" name="Text 36"/>
+          <p:cNvPr id="33" name="Text 26"/>
           <p:cNvSpPr txBox="1"/>
           <p:nvPr/>
         </p:nvSpPr>
@@ -8273,7 +8098,7 @@
       </p:sp>
       <p:sp>
         <p:nvSpPr>
-          <p:cNvPr id="39" name="Text 37"/>
+          <p:cNvPr id="34" name="Text 27"/>
           <p:cNvSpPr txBox="1"/>
           <p:nvPr/>
         </p:nvSpPr>
